--- a/Documents/jeu.pptx
+++ b/Documents/jeu.pptx
@@ -121,6 +121,11 @@
       </a:defRPr>
     </a:lvl9pPr>
   </p:defaultTextStyle>
+  <p:extLst>
+    <p:ext uri="{EFAFB233-063F-42B5-8137-9DF3F51BA10A}">
+      <p15:sldGuideLst xmlns:p15="http://schemas.microsoft.com/office/powerpoint/2012/main"/>
+    </p:ext>
+  </p:extLst>
 </p:presentation>
 </file>
 
@@ -206,7 +211,7 @@
           <a:p>
             <a:fld id="{A574FB8C-80E2-B84D-8F3E-65B213C862AE}" type="datetimeFigureOut">
               <a:rPr lang="fr-FR" smtClean="0"/>
-              <a:t>30/09/2024</a:t>
+              <a:t>14/10/2024</a:t>
             </a:fld>
             <a:endParaRPr lang="fr-FR"/>
           </a:p>
@@ -956,7 +961,7 @@
           <a:p>
             <a:fld id="{0867B8EA-CBC3-9147-B099-2E5278A446C5}" type="datetimeFigureOut">
               <a:rPr lang="fr-FR" smtClean="0"/>
-              <a:t>30/09/2024</a:t>
+              <a:t>14/10/2024</a:t>
             </a:fld>
             <a:endParaRPr lang="fr-FR"/>
           </a:p>
@@ -1154,7 +1159,7 @@
           <a:p>
             <a:fld id="{0867B8EA-CBC3-9147-B099-2E5278A446C5}" type="datetimeFigureOut">
               <a:rPr lang="fr-FR" smtClean="0"/>
-              <a:t>30/09/2024</a:t>
+              <a:t>14/10/2024</a:t>
             </a:fld>
             <a:endParaRPr lang="fr-FR"/>
           </a:p>
@@ -1362,7 +1367,7 @@
           <a:p>
             <a:fld id="{0867B8EA-CBC3-9147-B099-2E5278A446C5}" type="datetimeFigureOut">
               <a:rPr lang="fr-FR" smtClean="0"/>
-              <a:t>30/09/2024</a:t>
+              <a:t>14/10/2024</a:t>
             </a:fld>
             <a:endParaRPr lang="fr-FR"/>
           </a:p>
@@ -1560,7 +1565,7 @@
           <a:p>
             <a:fld id="{0867B8EA-CBC3-9147-B099-2E5278A446C5}" type="datetimeFigureOut">
               <a:rPr lang="fr-FR" smtClean="0"/>
-              <a:t>30/09/2024</a:t>
+              <a:t>14/10/2024</a:t>
             </a:fld>
             <a:endParaRPr lang="fr-FR"/>
           </a:p>
@@ -1835,7 +1840,7 @@
           <a:p>
             <a:fld id="{0867B8EA-CBC3-9147-B099-2E5278A446C5}" type="datetimeFigureOut">
               <a:rPr lang="fr-FR" smtClean="0"/>
-              <a:t>30/09/2024</a:t>
+              <a:t>14/10/2024</a:t>
             </a:fld>
             <a:endParaRPr lang="fr-FR"/>
           </a:p>
@@ -2100,7 +2105,7 @@
           <a:p>
             <a:fld id="{0867B8EA-CBC3-9147-B099-2E5278A446C5}" type="datetimeFigureOut">
               <a:rPr lang="fr-FR" smtClean="0"/>
-              <a:t>30/09/2024</a:t>
+              <a:t>14/10/2024</a:t>
             </a:fld>
             <a:endParaRPr lang="fr-FR"/>
           </a:p>
@@ -2512,7 +2517,7 @@
           <a:p>
             <a:fld id="{0867B8EA-CBC3-9147-B099-2E5278A446C5}" type="datetimeFigureOut">
               <a:rPr lang="fr-FR" smtClean="0"/>
-              <a:t>30/09/2024</a:t>
+              <a:t>14/10/2024</a:t>
             </a:fld>
             <a:endParaRPr lang="fr-FR"/>
           </a:p>
@@ -2653,7 +2658,7 @@
           <a:p>
             <a:fld id="{0867B8EA-CBC3-9147-B099-2E5278A446C5}" type="datetimeFigureOut">
               <a:rPr lang="fr-FR" smtClean="0"/>
-              <a:t>30/09/2024</a:t>
+              <a:t>14/10/2024</a:t>
             </a:fld>
             <a:endParaRPr lang="fr-FR"/>
           </a:p>
@@ -2766,7 +2771,7 @@
           <a:p>
             <a:fld id="{0867B8EA-CBC3-9147-B099-2E5278A446C5}" type="datetimeFigureOut">
               <a:rPr lang="fr-FR" smtClean="0"/>
-              <a:t>30/09/2024</a:t>
+              <a:t>14/10/2024</a:t>
             </a:fld>
             <a:endParaRPr lang="fr-FR"/>
           </a:p>
@@ -3077,7 +3082,7 @@
           <a:p>
             <a:fld id="{0867B8EA-CBC3-9147-B099-2E5278A446C5}" type="datetimeFigureOut">
               <a:rPr lang="fr-FR" smtClean="0"/>
-              <a:t>30/09/2024</a:t>
+              <a:t>14/10/2024</a:t>
             </a:fld>
             <a:endParaRPr lang="fr-FR"/>
           </a:p>
@@ -3365,7 +3370,7 @@
           <a:p>
             <a:fld id="{0867B8EA-CBC3-9147-B099-2E5278A446C5}" type="datetimeFigureOut">
               <a:rPr lang="fr-FR" smtClean="0"/>
-              <a:t>30/09/2024</a:t>
+              <a:t>14/10/2024</a:t>
             </a:fld>
             <a:endParaRPr lang="fr-FR"/>
           </a:p>
@@ -3606,7 +3611,7 @@
           <a:p>
             <a:fld id="{0867B8EA-CBC3-9147-B099-2E5278A446C5}" type="datetimeFigureOut">
               <a:rPr lang="fr-FR" smtClean="0"/>
-              <a:t>30/09/2024</a:t>
+              <a:t>14/10/2024</a:t>
             </a:fld>
             <a:endParaRPr lang="fr-FR"/>
           </a:p>
@@ -4266,11 +4271,11 @@
   <p:clrMapOvr>
     <a:masterClrMapping/>
   </p:clrMapOvr>
-  <mc:AlternateContent xmlns:mc="http://schemas.openxmlformats.org/markup-compatibility/2006">
-    <mc:Choice xmlns:p14="http://schemas.microsoft.com/office/powerpoint/2010/main" Requires="p14">
+  <mc:AlternateContent xmlns:mc="http://schemas.openxmlformats.org/markup-compatibility/2006" xmlns:p14="http://schemas.microsoft.com/office/powerpoint/2010/main">
+    <mc:Choice Requires="p14">
       <p:transition spd="slow" p14:dur="2000" advClick="0"/>
     </mc:Choice>
-    <mc:Fallback>
+    <mc:Fallback xmlns="">
       <p:transition spd="slow" advClick="0"/>
     </mc:Fallback>
   </mc:AlternateContent>
@@ -5868,11 +5873,11 @@
   <p:clrMapOvr>
     <a:masterClrMapping/>
   </p:clrMapOvr>
-  <mc:AlternateContent xmlns:mc="http://schemas.openxmlformats.org/markup-compatibility/2006">
-    <mc:Choice xmlns:p14="http://schemas.microsoft.com/office/powerpoint/2010/main" Requires="p14">
+  <mc:AlternateContent xmlns:mc="http://schemas.openxmlformats.org/markup-compatibility/2006" xmlns:p14="http://schemas.microsoft.com/office/powerpoint/2010/main">
+    <mc:Choice Requires="p14">
       <p:transition spd="slow" p14:dur="2000" advClick="0"/>
     </mc:Choice>
-    <mc:Fallback>
+    <mc:Fallback xmlns="">
       <p:transition spd="slow" advClick="0"/>
     </mc:Fallback>
   </mc:AlternateContent>
@@ -7327,11 +7332,11 @@
   <p:clrMapOvr>
     <a:masterClrMapping/>
   </p:clrMapOvr>
-  <mc:AlternateContent xmlns:mc="http://schemas.openxmlformats.org/markup-compatibility/2006">
-    <mc:Choice xmlns:p14="http://schemas.microsoft.com/office/powerpoint/2010/main" Requires="p14">
+  <mc:AlternateContent xmlns:mc="http://schemas.openxmlformats.org/markup-compatibility/2006" xmlns:p14="http://schemas.microsoft.com/office/powerpoint/2010/main">
+    <mc:Choice Requires="p14">
       <p:transition spd="slow" p14:dur="2000" advClick="0"/>
     </mc:Choice>
-    <mc:Fallback>
+    <mc:Fallback xmlns="">
       <p:transition spd="slow" advClick="0"/>
     </mc:Fallback>
   </mc:AlternateContent>
@@ -8929,11 +8934,11 @@
   <p:clrMapOvr>
     <a:masterClrMapping/>
   </p:clrMapOvr>
-  <mc:AlternateContent xmlns:mc="http://schemas.openxmlformats.org/markup-compatibility/2006">
-    <mc:Choice xmlns:p14="http://schemas.microsoft.com/office/powerpoint/2010/main" Requires="p14">
+  <mc:AlternateContent xmlns:mc="http://schemas.openxmlformats.org/markup-compatibility/2006" xmlns:p14="http://schemas.microsoft.com/office/powerpoint/2010/main">
+    <mc:Choice Requires="p14">
       <p:transition spd="slow" p14:dur="2000" advClick="0"/>
     </mc:Choice>
-    <mc:Fallback>
+    <mc:Fallback xmlns="">
       <p:transition spd="slow" advClick="0"/>
     </mc:Fallback>
   </mc:AlternateContent>
@@ -10531,11 +10536,11 @@
   <p:clrMapOvr>
     <a:masterClrMapping/>
   </p:clrMapOvr>
-  <mc:AlternateContent xmlns:mc="http://schemas.openxmlformats.org/markup-compatibility/2006">
-    <mc:Choice xmlns:p14="http://schemas.microsoft.com/office/powerpoint/2010/main" Requires="p14">
+  <mc:AlternateContent xmlns:mc="http://schemas.openxmlformats.org/markup-compatibility/2006" xmlns:p14="http://schemas.microsoft.com/office/powerpoint/2010/main">
+    <mc:Choice Requires="p14">
       <p:transition spd="slow" p14:dur="2000" advClick="0"/>
     </mc:Choice>
-    <mc:Fallback>
+    <mc:Fallback xmlns="">
       <p:transition spd="slow" advClick="0"/>
     </mc:Fallback>
   </mc:AlternateContent>
@@ -12133,11 +12138,11 @@
   <p:clrMapOvr>
     <a:masterClrMapping/>
   </p:clrMapOvr>
-  <mc:AlternateContent xmlns:mc="http://schemas.openxmlformats.org/markup-compatibility/2006">
-    <mc:Choice xmlns:p14="http://schemas.microsoft.com/office/powerpoint/2010/main" Requires="p14">
+  <mc:AlternateContent xmlns:mc="http://schemas.openxmlformats.org/markup-compatibility/2006" xmlns:p14="http://schemas.microsoft.com/office/powerpoint/2010/main">
+    <mc:Choice Requires="p14">
       <p:transition spd="slow" p14:dur="2000" advClick="0"/>
     </mc:Choice>
-    <mc:Fallback>
+    <mc:Fallback xmlns="">
       <p:transition spd="slow" advClick="0"/>
     </mc:Fallback>
   </mc:AlternateContent>
@@ -12176,7 +12181,7 @@
           <p:nvPr>
             <p:extLst>
               <p:ext uri="{D42A27DB-BD31-4B8C-83A1-F6EECF244321}">
-                <p14:modId xmlns:p14="http://schemas.microsoft.com/office/powerpoint/2010/main" val="3040745210"/>
+                <p14:modId xmlns:p14="http://schemas.microsoft.com/office/powerpoint/2010/main" val="1438704051"/>
               </p:ext>
             </p:extLst>
           </p:nvPr>
@@ -12361,7 +12366,15 @@
                       <a:pPr algn="ctr"/>
                       <a:r>
                         <a:rPr lang="fr-FR" sz="1600" dirty="0"/>
-                        <a:t>#776e65</a:t>
+                        <a:t>#</a:t>
+                      </a:r>
+                      <a:r>
+                        <a:rPr lang="fr-FR" sz="1600" dirty="0">
+                          <a:solidFill>
+                            <a:srgbClr val="776E65"/>
+                          </a:solidFill>
+                        </a:rPr>
+                        <a:t>776e65</a:t>
                       </a:r>
                     </a:p>
                   </a:txBody>
@@ -12493,7 +12506,15 @@
                       <a:pPr algn="ctr"/>
                       <a:r>
                         <a:rPr lang="fr-FR" sz="1600" dirty="0"/>
-                        <a:t>#f9f6f2</a:t>
+                        <a:t>#</a:t>
+                      </a:r>
+                      <a:r>
+                        <a:rPr lang="fr-FR" sz="1600" dirty="0">
+                          <a:solidFill>
+                            <a:srgbClr val="F9F6F2"/>
+                          </a:solidFill>
+                        </a:rPr>
+                        <a:t>f9f6f2</a:t>
                       </a:r>
                     </a:p>
                   </a:txBody>
@@ -14328,11 +14349,11 @@
   <p:clrMapOvr>
     <a:masterClrMapping/>
   </p:clrMapOvr>
-  <mc:AlternateContent xmlns:mc="http://schemas.openxmlformats.org/markup-compatibility/2006">
-    <mc:Choice xmlns:p14="http://schemas.microsoft.com/office/powerpoint/2010/main" Requires="p14">
+  <mc:AlternateContent xmlns:mc="http://schemas.openxmlformats.org/markup-compatibility/2006" xmlns:p14="http://schemas.microsoft.com/office/powerpoint/2010/main">
+    <mc:Choice Requires="p14">
       <p:transition spd="slow" p14:dur="2000" advClick="0"/>
     </mc:Choice>
-    <mc:Fallback>
+    <mc:Fallback xmlns="">
       <p:transition spd="slow" advClick="0"/>
     </mc:Fallback>
   </mc:AlternateContent>
@@ -14863,11 +14884,11 @@
   <p:clrMapOvr>
     <a:masterClrMapping/>
   </p:clrMapOvr>
-  <mc:AlternateContent xmlns:mc="http://schemas.openxmlformats.org/markup-compatibility/2006">
-    <mc:Choice xmlns:p14="http://schemas.microsoft.com/office/powerpoint/2010/main" Requires="p14">
+  <mc:AlternateContent xmlns:mc="http://schemas.openxmlformats.org/markup-compatibility/2006" xmlns:p14="http://schemas.microsoft.com/office/powerpoint/2010/main">
+    <mc:Choice Requires="p14">
       <p:transition spd="slow" p14:dur="2000" advClick="0"/>
     </mc:Choice>
-    <mc:Fallback>
+    <mc:Fallback xmlns="">
       <p:transition spd="slow" advClick="0"/>
     </mc:Fallback>
   </mc:AlternateContent>
@@ -15405,11 +15426,11 @@
   <p:clrMapOvr>
     <a:masterClrMapping/>
   </p:clrMapOvr>
-  <mc:AlternateContent xmlns:mc="http://schemas.openxmlformats.org/markup-compatibility/2006">
-    <mc:Choice xmlns:p14="http://schemas.microsoft.com/office/powerpoint/2010/main" Requires="p14">
+  <mc:AlternateContent xmlns:mc="http://schemas.openxmlformats.org/markup-compatibility/2006" xmlns:p14="http://schemas.microsoft.com/office/powerpoint/2010/main">
+    <mc:Choice Requires="p14">
       <p:transition spd="slow" p14:dur="2000" advClick="0"/>
     </mc:Choice>
-    <mc:Fallback>
+    <mc:Fallback xmlns="">
       <p:transition spd="slow" advClick="0"/>
     </mc:Fallback>
   </mc:AlternateContent>
@@ -16048,11 +16069,11 @@
   <p:clrMapOvr>
     <a:masterClrMapping/>
   </p:clrMapOvr>
-  <mc:AlternateContent xmlns:mc="http://schemas.openxmlformats.org/markup-compatibility/2006">
-    <mc:Choice xmlns:p14="http://schemas.microsoft.com/office/powerpoint/2010/main" Requires="p14">
+  <mc:AlternateContent xmlns:mc="http://schemas.openxmlformats.org/markup-compatibility/2006" xmlns:p14="http://schemas.microsoft.com/office/powerpoint/2010/main">
+    <mc:Choice Requires="p14">
       <p:transition spd="slow" p14:dur="2000" advClick="0"/>
     </mc:Choice>
-    <mc:Fallback>
+    <mc:Fallback xmlns="">
       <p:transition spd="slow" advClick="0"/>
     </mc:Fallback>
   </mc:AlternateContent>
@@ -16508,11 +16529,11 @@
   <p:clrMapOvr>
     <a:masterClrMapping/>
   </p:clrMapOvr>
-  <mc:AlternateContent xmlns:mc="http://schemas.openxmlformats.org/markup-compatibility/2006">
-    <mc:Choice xmlns:p14="http://schemas.microsoft.com/office/powerpoint/2010/main" Requires="p14">
+  <mc:AlternateContent xmlns:mc="http://schemas.openxmlformats.org/markup-compatibility/2006" xmlns:p14="http://schemas.microsoft.com/office/powerpoint/2010/main">
+    <mc:Choice Requires="p14">
       <p:transition spd="slow" p14:dur="2000" advClick="0"/>
     </mc:Choice>
-    <mc:Fallback>
+    <mc:Fallback xmlns="">
       <p:transition spd="slow" advClick="0"/>
     </mc:Fallback>
   </mc:AlternateContent>
@@ -17542,11 +17563,11 @@
   <p:clrMapOvr>
     <a:masterClrMapping/>
   </p:clrMapOvr>
-  <mc:AlternateContent xmlns:mc="http://schemas.openxmlformats.org/markup-compatibility/2006">
-    <mc:Choice xmlns:p14="http://schemas.microsoft.com/office/powerpoint/2010/main" Requires="p14">
+  <mc:AlternateContent xmlns:mc="http://schemas.openxmlformats.org/markup-compatibility/2006" xmlns:p14="http://schemas.microsoft.com/office/powerpoint/2010/main">
+    <mc:Choice Requires="p14">
       <p:transition spd="slow" p14:dur="2000" advClick="0"/>
     </mc:Choice>
-    <mc:Fallback>
+    <mc:Fallback xmlns="">
       <p:transition spd="slow" advClick="0"/>
     </mc:Fallback>
   </mc:AlternateContent>
@@ -18310,11 +18331,11 @@
   <p:clrMapOvr>
     <a:masterClrMapping/>
   </p:clrMapOvr>
-  <mc:AlternateContent xmlns:mc="http://schemas.openxmlformats.org/markup-compatibility/2006">
-    <mc:Choice xmlns:p14="http://schemas.microsoft.com/office/powerpoint/2010/main" Requires="p14">
+  <mc:AlternateContent xmlns:mc="http://schemas.openxmlformats.org/markup-compatibility/2006" xmlns:p14="http://schemas.microsoft.com/office/powerpoint/2010/main">
+    <mc:Choice Requires="p14">
       <p:transition spd="slow" p14:dur="2000" advClick="0"/>
     </mc:Choice>
-    <mc:Fallback>
+    <mc:Fallback xmlns="">
       <p:transition spd="slow" advClick="0"/>
     </mc:Fallback>
   </mc:AlternateContent>
@@ -19677,11 +19698,11 @@
   <p:clrMapOvr>
     <a:masterClrMapping/>
   </p:clrMapOvr>
-  <mc:AlternateContent xmlns:mc="http://schemas.openxmlformats.org/markup-compatibility/2006">
-    <mc:Choice xmlns:p14="http://schemas.microsoft.com/office/powerpoint/2010/main" Requires="p14">
+  <mc:AlternateContent xmlns:mc="http://schemas.openxmlformats.org/markup-compatibility/2006" xmlns:p14="http://schemas.microsoft.com/office/powerpoint/2010/main">
+    <mc:Choice Requires="p14">
       <p:transition spd="slow" p14:dur="2000" advClick="0"/>
     </mc:Choice>
-    <mc:Fallback>
+    <mc:Fallback xmlns="">
       <p:transition spd="slow" advClick="0"/>
     </mc:Fallback>
   </mc:AlternateContent>
